--- a/public/fun/pack/pptx/family/가족소개_45_반려동물과함께_한지등.pptx
+++ b/public/fun/pack/pptx/family/가족소개_45_반려동물과함께_한지등.pptx
@@ -3286,6 +3286,14 @@
 <file path=ppt/slides/slide1.xml><?xml version="1.0" encoding="utf-8"?>
 <p:sld xmlns:a="http://schemas.openxmlformats.org/drawingml/2006/main" xmlns:p="http://schemas.openxmlformats.org/presentationml/2006/main" xmlns:r="http://schemas.openxmlformats.org/officeDocument/2006/relationships">
   <p:cSld>
+    <p:bg>
+      <p:bgPr>
+        <a:solidFill>
+          <a:srgbClr val="F6EAD5"/>
+        </a:solidFill>
+        <a:effectLst/>
+      </p:bgPr>
+    </p:bg>
     <p:spTree>
       <p:nvGrpSpPr>
         <p:cNvPr id="1" name=""/>
@@ -3293,30 +3301,119 @@
         <p:nvPr/>
       </p:nvGrpSpPr>
       <p:grpSpPr/>
-      <p:pic>
-        <p:nvPicPr>
-          <p:cNvPr id="3" name="표지 그림" descr="family-45.jpg"/>
-          <p:cNvPicPr>
-            <a:picLocks noChangeAspect="1"/>
-          </p:cNvPicPr>
-          <p:nvPr/>
-        </p:nvPicPr>
-        <p:blipFill>
-          <a:blip r:embed="rId2"/>
-          <a:stretch>
-            <a:fillRect/>
-          </a:stretch>
-        </p:blipFill>
-        <p:spPr>
-          <a:xfrm>
-            <a:off x="0" y="0"/>
-            <a:ext cx="12191695" cy="6858000"/>
+      <p:sp>
+        <p:nvSpPr>
+          <p:cNvPr id="3" name="사진 자리"/>
+          <p:cNvSpPr/>
+          <p:nvPr/>
+        </p:nvSpPr>
+        <p:spPr>
+          <a:xfrm>
+            <a:off x="7558851" y="685800"/>
+            <a:ext cx="3169840" cy="5486400"/>
+          </a:xfrm>
+          <a:prstGeom prst="round2SameRect">
+            <a:avLst>
+              <a:gd name="adj1" fmla="val 50000"/>
+              <a:gd name="adj2" fmla="val 0"/>
+            </a:avLst>
+          </a:prstGeom>
+          <a:solidFill>
+            <a:srgbClr val="EBD4AD"/>
+          </a:solidFill>
+          <a:ln>
+            <a:noFill/>
+          </a:ln>
+        </p:spPr>
+        <p:txBody>
+          <a:bodyPr rtlCol="0" anchor="ctr" wrap="square" lIns="54864" rIns="54864" tIns="27432" bIns="27432">
+            <a:noAutofit/>
+          </a:bodyPr>
+          <a:lstStyle/>
+          <a:p>
+            <a:pPr algn="ctr">
+              <a:lnSpc>
+                <a:spcPct val="100000"/>
+              </a:lnSpc>
+            </a:pPr>
+            <a:r>
+              <a:rPr sz="1400" b="0" i="0">
+                <a:solidFill>
+                  <a:srgbClr val="493D27"/>
+                </a:solidFill>
+              </a:rPr>
+              <a:t>사진을 넣어 주세요</a:t>
+            </a:r>
+          </a:p>
+        </p:txBody>
+      </p:sp>
+      <p:sp>
+        <p:nvSpPr>
+          <p:cNvPr id="4" name="장식"/>
+          <p:cNvSpPr/>
+          <p:nvPr/>
+        </p:nvSpPr>
+        <p:spPr>
+          <a:xfrm>
+            <a:off x="6827349" y="4251960"/>
+            <a:ext cx="1005840" cy="1005840"/>
+          </a:xfrm>
+          <a:prstGeom prst="ellipse">
+            <a:avLst/>
+          </a:prstGeom>
+          <a:solidFill>
+            <a:srgbClr val="EBD4AD"/>
+          </a:solidFill>
+          <a:ln>
+            <a:noFill/>
+          </a:ln>
+        </p:spPr>
+        <p:txBody>
+          <a:bodyPr rtlCol="0" anchor="ctr"/>
+          <a:lstStyle/>
+          <a:p>
+            <a:pPr algn="ctr"/>
+          </a:p>
+        </p:txBody>
+      </p:sp>
+      <p:sp>
+        <p:nvSpPr>
+          <p:cNvPr id="5" name="라벨"/>
+          <p:cNvSpPr txBox="1"/>
+          <p:nvPr/>
+        </p:nvSpPr>
+        <p:spPr>
+          <a:xfrm>
+            <a:off x="822960" y="2148840"/>
+            <a:ext cx="5608179" cy="274320"/>
           </a:xfrm>
           <a:prstGeom prst="rect">
             <a:avLst/>
           </a:prstGeom>
-        </p:spPr>
-      </p:pic>
+          <a:noFill/>
+        </p:spPr>
+        <p:txBody>
+          <a:bodyPr wrap="square" lIns="54864" rIns="54864" tIns="27432" bIns="27432" anchor="t">
+            <a:noAutofit/>
+          </a:bodyPr>
+          <a:lstStyle/>
+          <a:p>
+            <a:pPr algn="l">
+              <a:lnSpc>
+                <a:spcPct val="115000"/>
+              </a:lnSpc>
+            </a:pPr>
+            <a:r>
+              <a:rPr sz="1000" b="1" i="0" spc="250">
+                <a:solidFill>
+                  <a:srgbClr val="26231F"/>
+                </a:solidFill>
+              </a:rPr>
+              <a:t>FAMILY ALBUM</a:t>
+            </a:r>
+          </a:p>
+        </p:txBody>
+      </p:sp>
       <p:sp>
         <p:nvSpPr>
           <p:cNvPr id="2" name="Title 1"/>
@@ -3329,8 +3426,8 @@
         </p:nvSpPr>
         <p:spPr>
           <a:xfrm>
-            <a:off x="853418" y="2057400"/>
-            <a:ext cx="6095847" cy="1554480"/>
+            <a:off x="822960" y="2606040"/>
+            <a:ext cx="5608179" cy="1188720"/>
           </a:xfrm>
         </p:spPr>
         <p:txBody>
@@ -3345,9 +3442,9 @@
               </a:lnSpc>
             </a:pPr>
             <a:r>
-              <a:rPr sz="3600" b="1" i="0">
-                <a:solidFill>
-                  <a:srgbClr val="7C5D27"/>
+              <a:rPr sz="4000" b="1" i="0">
+                <a:solidFill>
+                  <a:srgbClr val="26231F"/>
                 </a:solidFill>
               </a:rPr>
               <a:t>우리 가족을 소개합니다</a:t>
@@ -3357,14 +3454,14 @@
       </p:sp>
       <p:sp>
         <p:nvSpPr>
-          <p:cNvPr id="4" name="한 줄 문구"/>
+          <p:cNvPr id="6" name="한 줄 문구"/>
           <p:cNvSpPr txBox="1"/>
           <p:nvPr/>
         </p:nvSpPr>
         <p:spPr>
           <a:xfrm>
-            <a:off x="853418" y="3749039"/>
-            <a:ext cx="6095847" cy="822960"/>
+            <a:off x="822960" y="3886200"/>
+            <a:ext cx="5608179" cy="822960"/>
           </a:xfrm>
           <a:prstGeom prst="rect">
             <a:avLst/>
@@ -3383,9 +3480,9 @@
               </a:lnSpc>
             </a:pPr>
             <a:r>
-              <a:rPr sz="1700" b="0" i="1">
-                <a:solidFill>
-                  <a:srgbClr val="7C5D27"/>
+              <a:rPr sz="1700" b="0" i="0">
+                <a:solidFill>
+                  <a:srgbClr val="26231F"/>
                 </a:solidFill>
               </a:rPr>
               <a:t>한지 등 아래서 졸던 모습</a:t>
@@ -3395,14 +3492,14 @@
       </p:sp>
       <p:sp>
         <p:nvSpPr>
-          <p:cNvPr id="5" name="안내 문구"/>
+          <p:cNvPr id="7" name="안내 문구"/>
           <p:cNvSpPr txBox="1"/>
           <p:nvPr/>
         </p:nvSpPr>
         <p:spPr>
           <a:xfrm>
-            <a:off x="853418" y="4617720"/>
-            <a:ext cx="6095847" cy="914400"/>
+            <a:off x="822960" y="4754880"/>
+            <a:ext cx="5608179" cy="914400"/>
           </a:xfrm>
           <a:prstGeom prst="rect">
             <a:avLst/>
@@ -3423,10 +3520,10 @@
             <a:r>
               <a:rPr sz="1400" b="0" i="0">
                 <a:solidFill>
-                  <a:srgbClr val="666666"/>
+                  <a:srgbClr val="26231F"/>
                 </a:solidFill>
               </a:rPr>
-              <a:t>반려동물과 함께 · 2027. 00. 00</a:t>
+              <a:t>반려동물과 함께 · 날짜 입력</a:t>
             </a:r>
           </a:p>
         </p:txBody>
@@ -3445,7 +3542,7 @@
     <p:bg>
       <p:bgPr>
         <a:solidFill>
-          <a:srgbClr val="FAF6EF"/>
+          <a:srgbClr val="FFFFFF"/>
         </a:solidFill>
         <a:effectLst/>
       </p:bgPr>
@@ -3465,14 +3562,14 @@
         </p:nvSpPr>
         <p:spPr>
           <a:xfrm>
-            <a:off x="0" y="0"/>
-            <a:ext cx="12191695" cy="274320"/>
+            <a:off x="0" y="6565392"/>
+            <a:ext cx="12191695" cy="292608"/>
           </a:xfrm>
           <a:prstGeom prst="rect">
             <a:avLst/>
           </a:prstGeom>
           <a:solidFill>
-            <a:srgbClr val="C49645"/>
+            <a:srgbClr val="EBD4AD"/>
           </a:solidFill>
           <a:ln>
             <a:noFill/>
@@ -3494,14 +3591,14 @@
         </p:nvSpPr>
         <p:spPr>
           <a:xfrm>
-            <a:off x="0" y="274320"/>
-            <a:ext cx="12191695" cy="54864"/>
+            <a:off x="640080" y="6400800"/>
+            <a:ext cx="10911535" cy="10972"/>
           </a:xfrm>
           <a:prstGeom prst="rect">
             <a:avLst/>
           </a:prstGeom>
           <a:solidFill>
-            <a:srgbClr val="3B8591"/>
+            <a:srgbClr val="26231F"/>
           </a:solidFill>
           <a:ln>
             <a:noFill/>
@@ -3517,6 +3614,73 @@
       </p:sp>
       <p:sp>
         <p:nvSpPr>
+          <p:cNvPr id="5" name="하단 라벨"/>
+          <p:cNvSpPr txBox="1"/>
+          <p:nvPr/>
+        </p:nvSpPr>
+        <p:spPr>
+          <a:xfrm>
+            <a:off x="640080" y="6437376"/>
+            <a:ext cx="5486400" cy="274320"/>
+          </a:xfrm>
+          <a:prstGeom prst="rect">
+            <a:avLst/>
+          </a:prstGeom>
+          <a:noFill/>
+        </p:spPr>
+        <p:txBody>
+          <a:bodyPr wrap="square" lIns="54864" rIns="54864" tIns="27432" bIns="27432" anchor="ctr">
+            <a:noAutofit/>
+          </a:bodyPr>
+          <a:lstStyle/>
+          <a:p>
+            <a:pPr algn="l">
+              <a:lnSpc>
+                <a:spcPct val="115000"/>
+              </a:lnSpc>
+            </a:pPr>
+            <a:r>
+              <a:rPr sz="900" b="1" i="0" spc="250">
+                <a:solidFill>
+                  <a:srgbClr val="26231F"/>
+                </a:solidFill>
+              </a:rPr>
+              <a:t>FAMILY ALBUM</a:t>
+            </a:r>
+          </a:p>
+        </p:txBody>
+      </p:sp>
+      <p:sp>
+        <p:nvSpPr>
+          <p:cNvPr id="6" name="포인트"/>
+          <p:cNvSpPr/>
+          <p:nvPr/>
+        </p:nvSpPr>
+        <p:spPr>
+          <a:xfrm>
+            <a:off x="11213287" y="6473952"/>
+            <a:ext cx="219456" cy="219456"/>
+          </a:xfrm>
+          <a:prstGeom prst="star4">
+            <a:avLst/>
+          </a:prstGeom>
+          <a:solidFill>
+            <a:srgbClr val="E1C698"/>
+          </a:solidFill>
+          <a:ln>
+            <a:noFill/>
+          </a:ln>
+        </p:spPr>
+        <p:txBody>
+          <a:bodyPr rtlCol="0" anchor="ctr"/>
+          <a:lstStyle/>
+          <a:p>
+            <a:pPr algn="ctr"/>
+          </a:p>
+        </p:txBody>
+      </p:sp>
+      <p:sp>
+        <p:nvSpPr>
           <p:cNvPr id="2" name="Title 1"/>
           <p:cNvSpPr>
             <a:spLocks noGrp="1"/>
@@ -3527,8 +3691,8 @@
         </p:nvSpPr>
         <p:spPr>
           <a:xfrm>
-            <a:off x="640080" y="457200"/>
-            <a:ext cx="9722815" cy="868680"/>
+            <a:off x="640080" y="502920"/>
+            <a:ext cx="10911535" cy="914400"/>
           </a:xfrm>
         </p:spPr>
         <p:txBody>
@@ -3545,7 +3709,7 @@
             <a:r>
               <a:rPr sz="3000" b="1" i="0">
                 <a:solidFill>
-                  <a:srgbClr val="7C5D27"/>
+                  <a:srgbClr val="26231F"/>
                 </a:solidFill>
               </a:rPr>
               <a:t>가족 구성원</a:t>
@@ -3555,25 +3719,23 @@
       </p:sp>
       <p:sp>
         <p:nvSpPr>
-          <p:cNvPr id="5" name="사진 자리"/>
+          <p:cNvPr id="7" name="사진 자리"/>
           <p:cNvSpPr/>
           <p:nvPr/>
         </p:nvSpPr>
         <p:spPr>
           <a:xfrm>
-            <a:off x="1182319" y="1600200"/>
-            <a:ext cx="2400300" cy="2400300"/>
+            <a:off x="1239469" y="1600200"/>
+            <a:ext cx="2286000" cy="2286000"/>
           </a:xfrm>
           <a:prstGeom prst="ellipse">
             <a:avLst/>
           </a:prstGeom>
           <a:solidFill>
-            <a:srgbClr val="F2E5CF"/>
+            <a:srgbClr val="F6EAD5"/>
           </a:solidFill>
           <a:ln w="19050">
-            <a:solidFill>
-              <a:srgbClr val="C49645"/>
-            </a:solidFill>
+            <a:noFill/>
             <a:prstDash val="dash"/>
           </a:ln>
         </p:spPr>
@@ -3591,7 +3753,7 @@
             <a:r>
               <a:rPr sz="1200" b="0" i="0">
                 <a:solidFill>
-                  <a:srgbClr val="7C5D27"/>
+                  <a:srgbClr val="8E8780"/>
                 </a:solidFill>
               </a:rPr>
               <a:t>사진</a:t>
@@ -3601,13 +3763,13 @@
       </p:sp>
       <p:sp>
         <p:nvSpPr>
-          <p:cNvPr id="6" name="TextBox 5"/>
+          <p:cNvPr id="8" name="TextBox 7"/>
           <p:cNvSpPr txBox="1"/>
           <p:nvPr/>
         </p:nvSpPr>
         <p:spPr>
           <a:xfrm>
-            <a:off x="640080" y="4091939"/>
+            <a:off x="640080" y="3977639"/>
             <a:ext cx="3484778" cy="411480"/>
           </a:xfrm>
           <a:prstGeom prst="rect">
@@ -3629,7 +3791,7 @@
             <a:r>
               <a:rPr sz="1600" b="1" i="0">
                 <a:solidFill>
-                  <a:srgbClr val="7C5D27"/>
+                  <a:srgbClr val="493D27"/>
                 </a:solidFill>
               </a:rPr>
               <a:t>보호자 1</a:t>
@@ -3639,14 +3801,14 @@
       </p:sp>
       <p:sp>
         <p:nvSpPr>
-          <p:cNvPr id="7" name="TextBox 6"/>
+          <p:cNvPr id="9" name="TextBox 8"/>
           <p:cNvSpPr txBox="1"/>
           <p:nvPr/>
         </p:nvSpPr>
         <p:spPr>
           <a:xfrm>
-            <a:off x="731519" y="4549140"/>
-            <a:ext cx="3301898" cy="1851660"/>
+            <a:off x="731519" y="4434840"/>
+            <a:ext cx="3301898" cy="1737360"/>
           </a:xfrm>
           <a:prstGeom prst="rect">
             <a:avLst/>
@@ -3707,25 +3869,23 @@
       </p:sp>
       <p:sp>
         <p:nvSpPr>
-          <p:cNvPr id="8" name="사진 자리"/>
+          <p:cNvPr id="10" name="사진 자리"/>
           <p:cNvSpPr/>
           <p:nvPr/>
         </p:nvSpPr>
         <p:spPr>
           <a:xfrm>
-            <a:off x="4895697" y="1600200"/>
-            <a:ext cx="2400300" cy="2400300"/>
+            <a:off x="4952847" y="1600200"/>
+            <a:ext cx="2286000" cy="2286000"/>
           </a:xfrm>
           <a:prstGeom prst="ellipse">
             <a:avLst/>
           </a:prstGeom>
           <a:solidFill>
-            <a:srgbClr val="F2E5CF"/>
+            <a:srgbClr val="F6EAD5"/>
           </a:solidFill>
           <a:ln w="19050">
-            <a:solidFill>
-              <a:srgbClr val="C49645"/>
-            </a:solidFill>
+            <a:noFill/>
             <a:prstDash val="dash"/>
           </a:ln>
         </p:spPr>
@@ -3743,7 +3903,7 @@
             <a:r>
               <a:rPr sz="1200" b="0" i="0">
                 <a:solidFill>
-                  <a:srgbClr val="7C5D27"/>
+                  <a:srgbClr val="8E8780"/>
                 </a:solidFill>
               </a:rPr>
               <a:t>사진</a:t>
@@ -3753,13 +3913,13 @@
       </p:sp>
       <p:sp>
         <p:nvSpPr>
-          <p:cNvPr id="9" name="TextBox 8"/>
+          <p:cNvPr id="11" name="TextBox 10"/>
           <p:cNvSpPr txBox="1"/>
           <p:nvPr/>
         </p:nvSpPr>
         <p:spPr>
           <a:xfrm>
-            <a:off x="4353458" y="4091939"/>
+            <a:off x="4353458" y="3977639"/>
             <a:ext cx="3484778" cy="411480"/>
           </a:xfrm>
           <a:prstGeom prst="rect">
@@ -3781,7 +3941,7 @@
             <a:r>
               <a:rPr sz="1600" b="1" i="0">
                 <a:solidFill>
-                  <a:srgbClr val="7C5D27"/>
+                  <a:srgbClr val="493D27"/>
                 </a:solidFill>
               </a:rPr>
               <a:t>보호자 2</a:t>
@@ -3791,14 +3951,14 @@
       </p:sp>
       <p:sp>
         <p:nvSpPr>
-          <p:cNvPr id="10" name="TextBox 9"/>
+          <p:cNvPr id="12" name="TextBox 11"/>
           <p:cNvSpPr txBox="1"/>
           <p:nvPr/>
         </p:nvSpPr>
         <p:spPr>
           <a:xfrm>
-            <a:off x="4444898" y="4549140"/>
-            <a:ext cx="3301898" cy="1851660"/>
+            <a:off x="4444898" y="4434840"/>
+            <a:ext cx="3301898" cy="1737360"/>
           </a:xfrm>
           <a:prstGeom prst="rect">
             <a:avLst/>
@@ -3859,25 +4019,23 @@
       </p:sp>
       <p:sp>
         <p:nvSpPr>
-          <p:cNvPr id="11" name="사진 자리"/>
+          <p:cNvPr id="13" name="사진 자리"/>
           <p:cNvSpPr/>
           <p:nvPr/>
         </p:nvSpPr>
         <p:spPr>
           <a:xfrm>
-            <a:off x="8609076" y="1600200"/>
-            <a:ext cx="2400300" cy="2400300"/>
+            <a:off x="8666226" y="1600200"/>
+            <a:ext cx="2286000" cy="2286000"/>
           </a:xfrm>
           <a:prstGeom prst="ellipse">
             <a:avLst/>
           </a:prstGeom>
           <a:solidFill>
-            <a:srgbClr val="F2E5CF"/>
+            <a:srgbClr val="F6EAD5"/>
           </a:solidFill>
           <a:ln w="19050">
-            <a:solidFill>
-              <a:srgbClr val="C49645"/>
-            </a:solidFill>
+            <a:noFill/>
             <a:prstDash val="dash"/>
           </a:ln>
         </p:spPr>
@@ -3895,7 +4053,7 @@
             <a:r>
               <a:rPr sz="1200" b="0" i="0">
                 <a:solidFill>
-                  <a:srgbClr val="7C5D27"/>
+                  <a:srgbClr val="8E8780"/>
                 </a:solidFill>
               </a:rPr>
               <a:t>사진</a:t>
@@ -3905,13 +4063,13 @@
       </p:sp>
       <p:sp>
         <p:nvSpPr>
-          <p:cNvPr id="12" name="TextBox 11"/>
+          <p:cNvPr id="14" name="TextBox 13"/>
           <p:cNvSpPr txBox="1"/>
           <p:nvPr/>
         </p:nvSpPr>
         <p:spPr>
           <a:xfrm>
-            <a:off x="8066836" y="4091939"/>
+            <a:off x="8066836" y="3977639"/>
             <a:ext cx="3484778" cy="411480"/>
           </a:xfrm>
           <a:prstGeom prst="rect">
@@ -3933,7 +4091,7 @@
             <a:r>
               <a:rPr sz="1600" b="1" i="0">
                 <a:solidFill>
-                  <a:srgbClr val="7C5D27"/>
+                  <a:srgbClr val="493D27"/>
                 </a:solidFill>
               </a:rPr>
               <a:t>우리 반려동물</a:t>
@@ -3943,14 +4101,14 @@
       </p:sp>
       <p:sp>
         <p:nvSpPr>
-          <p:cNvPr id="13" name="TextBox 12"/>
+          <p:cNvPr id="15" name="TextBox 14"/>
           <p:cNvSpPr txBox="1"/>
           <p:nvPr/>
         </p:nvSpPr>
         <p:spPr>
           <a:xfrm>
-            <a:off x="8158276" y="4549140"/>
-            <a:ext cx="3301898" cy="1851660"/>
+            <a:off x="8158276" y="4434840"/>
+            <a:ext cx="3301898" cy="1737360"/>
           </a:xfrm>
           <a:prstGeom prst="rect">
             <a:avLst/>
@@ -4023,7 +4181,7 @@
     <p:bg>
       <p:bgPr>
         <a:solidFill>
-          <a:srgbClr val="FAF6EF"/>
+          <a:srgbClr val="FFFFFF"/>
         </a:solidFill>
         <a:effectLst/>
       </p:bgPr>
@@ -4043,14 +4201,14 @@
         </p:nvSpPr>
         <p:spPr>
           <a:xfrm>
-            <a:off x="0" y="0"/>
-            <a:ext cx="12191695" cy="274320"/>
+            <a:off x="0" y="6565392"/>
+            <a:ext cx="12191695" cy="292608"/>
           </a:xfrm>
           <a:prstGeom prst="rect">
             <a:avLst/>
           </a:prstGeom>
           <a:solidFill>
-            <a:srgbClr val="C49645"/>
+            <a:srgbClr val="EBD4AD"/>
           </a:solidFill>
           <a:ln>
             <a:noFill/>
@@ -4072,14 +4230,14 @@
         </p:nvSpPr>
         <p:spPr>
           <a:xfrm>
-            <a:off x="0" y="274320"/>
-            <a:ext cx="12191695" cy="54864"/>
+            <a:off x="640080" y="6400800"/>
+            <a:ext cx="10911535" cy="10972"/>
           </a:xfrm>
           <a:prstGeom prst="rect">
             <a:avLst/>
           </a:prstGeom>
           <a:solidFill>
-            <a:srgbClr val="3B8591"/>
+            <a:srgbClr val="26231F"/>
           </a:solidFill>
           <a:ln>
             <a:noFill/>
@@ -4095,6 +4253,73 @@
       </p:sp>
       <p:sp>
         <p:nvSpPr>
+          <p:cNvPr id="5" name="하단 라벨"/>
+          <p:cNvSpPr txBox="1"/>
+          <p:nvPr/>
+        </p:nvSpPr>
+        <p:spPr>
+          <a:xfrm>
+            <a:off x="640080" y="6437376"/>
+            <a:ext cx="5486400" cy="274320"/>
+          </a:xfrm>
+          <a:prstGeom prst="rect">
+            <a:avLst/>
+          </a:prstGeom>
+          <a:noFill/>
+        </p:spPr>
+        <p:txBody>
+          <a:bodyPr wrap="square" lIns="54864" rIns="54864" tIns="27432" bIns="27432" anchor="ctr">
+            <a:noAutofit/>
+          </a:bodyPr>
+          <a:lstStyle/>
+          <a:p>
+            <a:pPr algn="l">
+              <a:lnSpc>
+                <a:spcPct val="115000"/>
+              </a:lnSpc>
+            </a:pPr>
+            <a:r>
+              <a:rPr sz="900" b="1" i="0" spc="250">
+                <a:solidFill>
+                  <a:srgbClr val="26231F"/>
+                </a:solidFill>
+              </a:rPr>
+              <a:t>FAMILY ALBUM</a:t>
+            </a:r>
+          </a:p>
+        </p:txBody>
+      </p:sp>
+      <p:sp>
+        <p:nvSpPr>
+          <p:cNvPr id="6" name="포인트"/>
+          <p:cNvSpPr/>
+          <p:nvPr/>
+        </p:nvSpPr>
+        <p:spPr>
+          <a:xfrm>
+            <a:off x="11213287" y="6473952"/>
+            <a:ext cx="219456" cy="219456"/>
+          </a:xfrm>
+          <a:prstGeom prst="star4">
+            <a:avLst/>
+          </a:prstGeom>
+          <a:solidFill>
+            <a:srgbClr val="E1C698"/>
+          </a:solidFill>
+          <a:ln>
+            <a:noFill/>
+          </a:ln>
+        </p:spPr>
+        <p:txBody>
+          <a:bodyPr rtlCol="0" anchor="ctr"/>
+          <a:lstStyle/>
+          <a:p>
+            <a:pPr algn="ctr"/>
+          </a:p>
+        </p:txBody>
+      </p:sp>
+      <p:sp>
+        <p:nvSpPr>
           <p:cNvPr id="2" name="Title 1"/>
           <p:cNvSpPr>
             <a:spLocks noGrp="1"/>
@@ -4105,8 +4330,8 @@
         </p:nvSpPr>
         <p:spPr>
           <a:xfrm>
-            <a:off x="640080" y="457200"/>
-            <a:ext cx="9722815" cy="868680"/>
+            <a:off x="640080" y="502920"/>
+            <a:ext cx="10911535" cy="914400"/>
           </a:xfrm>
         </p:spPr>
         <p:txBody>
@@ -4123,7 +4348,7 @@
             <a:r>
               <a:rPr sz="3000" b="1" i="0">
                 <a:solidFill>
-                  <a:srgbClr val="7C5D27"/>
+                  <a:srgbClr val="26231F"/>
                 </a:solidFill>
               </a:rPr>
               <a:t>우리 가족 이야기</a:t>
@@ -4133,7 +4358,7 @@
       </p:sp>
       <p:sp>
         <p:nvSpPr>
-          <p:cNvPr id="5" name="타임라인 선"/>
+          <p:cNvPr id="7" name="타임라인 선"/>
           <p:cNvSpPr/>
           <p:nvPr/>
         </p:nvSpPr>
@@ -4146,7 +4371,7 @@
             <a:avLst/>
           </a:prstGeom>
           <a:solidFill>
-            <a:srgbClr val="F2E5CF"/>
+            <a:srgbClr val="F6EAD5"/>
           </a:solidFill>
           <a:ln>
             <a:noFill/>
@@ -4162,7 +4387,7 @@
       </p:sp>
       <p:sp>
         <p:nvSpPr>
-          <p:cNvPr id="6" name="때 1"/>
+          <p:cNvPr id="8" name="때 1"/>
           <p:cNvSpPr/>
           <p:nvPr/>
         </p:nvSpPr>
@@ -4175,7 +4400,7 @@
             <a:avLst/>
           </a:prstGeom>
           <a:solidFill>
-            <a:srgbClr val="C49645"/>
+            <a:srgbClr val="E1C698"/>
           </a:solidFill>
           <a:ln w="38100">
             <a:solidFill>
@@ -4193,7 +4418,7 @@
       </p:sp>
       <p:sp>
         <p:nvSpPr>
-          <p:cNvPr id="7" name="TextBox 6"/>
+          <p:cNvPr id="9" name="TextBox 8"/>
           <p:cNvSpPr txBox="1"/>
           <p:nvPr/>
         </p:nvSpPr>
@@ -4221,7 +4446,7 @@
             <a:r>
               <a:rPr sz="1600" b="1" i="0">
                 <a:solidFill>
-                  <a:srgbClr val="C49645"/>
+                  <a:srgbClr val="E1C698"/>
                 </a:solidFill>
               </a:rPr>
               <a:t>처음 만난 날</a:t>
@@ -4231,7 +4456,7 @@
       </p:sp>
       <p:sp>
         <p:nvSpPr>
-          <p:cNvPr id="8" name="TextBox 7"/>
+          <p:cNvPr id="10" name="TextBox 9"/>
           <p:cNvSpPr txBox="1"/>
           <p:nvPr/>
         </p:nvSpPr>
@@ -4259,7 +4484,7 @@
             <a:r>
               <a:rPr sz="1800" b="1" i="0">
                 <a:solidFill>
-                  <a:srgbClr val="7C5D27"/>
+                  <a:srgbClr val="493D27"/>
                 </a:solidFill>
               </a:rPr>
               <a:t>우리의 인연</a:t>
@@ -4269,7 +4494,7 @@
       </p:sp>
       <p:sp>
         <p:nvSpPr>
-          <p:cNvPr id="9" name="TextBox 8"/>
+          <p:cNvPr id="11" name="TextBox 10"/>
           <p:cNvSpPr txBox="1"/>
           <p:nvPr/>
         </p:nvSpPr>
@@ -4297,7 +4522,7 @@
             <a:r>
               <a:rPr sz="1500" b="0" i="0">
                 <a:solidFill>
-                  <a:srgbClr val="2B2B2B"/>
+                  <a:srgbClr val="26231F"/>
                 </a:solidFill>
               </a:rPr>
               <a:t>입양하던 날의 이야기</a:t>
@@ -4307,7 +4532,7 @@
       </p:sp>
       <p:sp>
         <p:nvSpPr>
-          <p:cNvPr id="10" name="때 2"/>
+          <p:cNvPr id="12" name="때 2"/>
           <p:cNvSpPr/>
           <p:nvPr/>
         </p:nvSpPr>
@@ -4320,7 +4545,7 @@
             <a:avLst/>
           </a:prstGeom>
           <a:solidFill>
-            <a:srgbClr val="C49645"/>
+            <a:srgbClr val="E1C698"/>
           </a:solidFill>
           <a:ln w="38100">
             <a:solidFill>
@@ -4338,7 +4563,7 @@
       </p:sp>
       <p:sp>
         <p:nvSpPr>
-          <p:cNvPr id="11" name="TextBox 10"/>
+          <p:cNvPr id="13" name="TextBox 12"/>
           <p:cNvSpPr txBox="1"/>
           <p:nvPr/>
         </p:nvSpPr>
@@ -4366,7 +4591,7 @@
             <a:r>
               <a:rPr sz="1600" b="1" i="0">
                 <a:solidFill>
-                  <a:srgbClr val="C49645"/>
+                  <a:srgbClr val="E1C698"/>
                 </a:solidFill>
               </a:rPr>
               <a:t>첫 산책</a:t>
@@ -4376,7 +4601,7 @@
       </p:sp>
       <p:sp>
         <p:nvSpPr>
-          <p:cNvPr id="12" name="TextBox 11"/>
+          <p:cNvPr id="14" name="TextBox 13"/>
           <p:cNvSpPr txBox="1"/>
           <p:nvPr/>
         </p:nvSpPr>
@@ -4404,7 +4629,7 @@
             <a:r>
               <a:rPr sz="1800" b="1" i="0">
                 <a:solidFill>
-                  <a:srgbClr val="7C5D27"/>
+                  <a:srgbClr val="493D27"/>
                 </a:solidFill>
               </a:rPr>
               <a:t>함께한 첫 걸음</a:t>
@@ -4414,7 +4639,7 @@
       </p:sp>
       <p:sp>
         <p:nvSpPr>
-          <p:cNvPr id="13" name="TextBox 12"/>
+          <p:cNvPr id="15" name="TextBox 14"/>
           <p:cNvSpPr txBox="1"/>
           <p:nvPr/>
         </p:nvSpPr>
@@ -4442,7 +4667,7 @@
             <a:r>
               <a:rPr sz="1500" b="0" i="0">
                 <a:solidFill>
-                  <a:srgbClr val="2B2B2B"/>
+                  <a:srgbClr val="26231F"/>
                 </a:solidFill>
               </a:rPr>
               <a:t>그날의 기억을 적어요</a:t>
@@ -4452,7 +4677,7 @@
       </p:sp>
       <p:sp>
         <p:nvSpPr>
-          <p:cNvPr id="14" name="때 3"/>
+          <p:cNvPr id="16" name="때 3"/>
           <p:cNvSpPr/>
           <p:nvPr/>
         </p:nvSpPr>
@@ -4465,7 +4690,7 @@
             <a:avLst/>
           </a:prstGeom>
           <a:solidFill>
-            <a:srgbClr val="C49645"/>
+            <a:srgbClr val="E1C698"/>
           </a:solidFill>
           <a:ln w="38100">
             <a:solidFill>
@@ -4483,7 +4708,7 @@
       </p:sp>
       <p:sp>
         <p:nvSpPr>
-          <p:cNvPr id="15" name="TextBox 14"/>
+          <p:cNvPr id="17" name="TextBox 16"/>
           <p:cNvSpPr txBox="1"/>
           <p:nvPr/>
         </p:nvSpPr>
@@ -4511,7 +4736,7 @@
             <a:r>
               <a:rPr sz="1600" b="1" i="0">
                 <a:solidFill>
-                  <a:srgbClr val="C49645"/>
+                  <a:srgbClr val="E1C698"/>
                 </a:solidFill>
               </a:rPr>
               <a:t>가장 웃었던 날</a:t>
@@ -4521,7 +4746,7 @@
       </p:sp>
       <p:sp>
         <p:nvSpPr>
-          <p:cNvPr id="16" name="TextBox 15"/>
+          <p:cNvPr id="18" name="TextBox 17"/>
           <p:cNvSpPr txBox="1"/>
           <p:nvPr/>
         </p:nvSpPr>
@@ -4549,7 +4774,7 @@
             <a:r>
               <a:rPr sz="1800" b="1" i="0">
                 <a:solidFill>
-                  <a:srgbClr val="7C5D27"/>
+                  <a:srgbClr val="493D27"/>
                 </a:solidFill>
               </a:rPr>
               <a:t>잊지 못할 순간</a:t>
@@ -4559,7 +4784,7 @@
       </p:sp>
       <p:sp>
         <p:nvSpPr>
-          <p:cNvPr id="17" name="TextBox 16"/>
+          <p:cNvPr id="19" name="TextBox 18"/>
           <p:cNvSpPr txBox="1"/>
           <p:nvPr/>
         </p:nvSpPr>
@@ -4587,7 +4812,7 @@
             <a:r>
               <a:rPr sz="1500" b="0" i="0">
                 <a:solidFill>
-                  <a:srgbClr val="2B2B2B"/>
+                  <a:srgbClr val="26231F"/>
                 </a:solidFill>
               </a:rPr>
               <a:t>사진으로 남겨 두세요</a:t>
@@ -4597,7 +4822,7 @@
       </p:sp>
       <p:sp>
         <p:nvSpPr>
-          <p:cNvPr id="18" name="때 4"/>
+          <p:cNvPr id="20" name="때 4"/>
           <p:cNvSpPr/>
           <p:nvPr/>
         </p:nvSpPr>
@@ -4610,7 +4835,7 @@
             <a:avLst/>
           </a:prstGeom>
           <a:solidFill>
-            <a:srgbClr val="C49645"/>
+            <a:srgbClr val="E1C698"/>
           </a:solidFill>
           <a:ln w="38100">
             <a:solidFill>
@@ -4628,7 +4853,7 @@
       </p:sp>
       <p:sp>
         <p:nvSpPr>
-          <p:cNvPr id="19" name="TextBox 18"/>
+          <p:cNvPr id="21" name="TextBox 20"/>
           <p:cNvSpPr txBox="1"/>
           <p:nvPr/>
         </p:nvSpPr>
@@ -4656,7 +4881,7 @@
             <a:r>
               <a:rPr sz="1600" b="1" i="0">
                 <a:solidFill>
-                  <a:srgbClr val="C49645"/>
+                  <a:srgbClr val="E1C698"/>
                 </a:solidFill>
               </a:rPr>
               <a:t>지금</a:t>
@@ -4666,7 +4891,7 @@
       </p:sp>
       <p:sp>
         <p:nvSpPr>
-          <p:cNvPr id="20" name="TextBox 19"/>
+          <p:cNvPr id="22" name="TextBox 21"/>
           <p:cNvSpPr txBox="1"/>
           <p:nvPr/>
         </p:nvSpPr>
@@ -4694,7 +4919,7 @@
             <a:r>
               <a:rPr sz="1800" b="1" i="0">
                 <a:solidFill>
-                  <a:srgbClr val="7C5D27"/>
+                  <a:srgbClr val="493D27"/>
                 </a:solidFill>
               </a:rPr>
               <a:t>오늘의 우리</a:t>
@@ -4704,7 +4929,7 @@
       </p:sp>
       <p:sp>
         <p:nvSpPr>
-          <p:cNvPr id="21" name="TextBox 20"/>
+          <p:cNvPr id="23" name="TextBox 22"/>
           <p:cNvSpPr txBox="1"/>
           <p:nvPr/>
         </p:nvSpPr>
@@ -4732,7 +4957,7 @@
             <a:r>
               <a:rPr sz="1500" b="0" i="0">
                 <a:solidFill>
-                  <a:srgbClr val="2B2B2B"/>
+                  <a:srgbClr val="26231F"/>
                 </a:solidFill>
               </a:rPr>
               <a:t>요즘 우리 이야기</a:t>
@@ -4754,7 +4979,7 @@
     <p:bg>
       <p:bgPr>
         <a:solidFill>
-          <a:srgbClr val="FAF6EF"/>
+          <a:srgbClr val="FFFFFF"/>
         </a:solidFill>
         <a:effectLst/>
       </p:bgPr>
@@ -4774,14 +4999,14 @@
         </p:nvSpPr>
         <p:spPr>
           <a:xfrm>
-            <a:off x="0" y="0"/>
-            <a:ext cx="12191695" cy="274320"/>
+            <a:off x="0" y="6565392"/>
+            <a:ext cx="12191695" cy="292608"/>
           </a:xfrm>
           <a:prstGeom prst="rect">
             <a:avLst/>
           </a:prstGeom>
           <a:solidFill>
-            <a:srgbClr val="C49645"/>
+            <a:srgbClr val="EBD4AD"/>
           </a:solidFill>
           <a:ln>
             <a:noFill/>
@@ -4803,14 +5028,14 @@
         </p:nvSpPr>
         <p:spPr>
           <a:xfrm>
-            <a:off x="0" y="274320"/>
-            <a:ext cx="12191695" cy="54864"/>
+            <a:off x="640080" y="6400800"/>
+            <a:ext cx="10911535" cy="10972"/>
           </a:xfrm>
           <a:prstGeom prst="rect">
             <a:avLst/>
           </a:prstGeom>
           <a:solidFill>
-            <a:srgbClr val="3B8591"/>
+            <a:srgbClr val="26231F"/>
           </a:solidFill>
           <a:ln>
             <a:noFill/>
@@ -4826,6 +5051,73 @@
       </p:sp>
       <p:sp>
         <p:nvSpPr>
+          <p:cNvPr id="5" name="하단 라벨"/>
+          <p:cNvSpPr txBox="1"/>
+          <p:nvPr/>
+        </p:nvSpPr>
+        <p:spPr>
+          <a:xfrm>
+            <a:off x="640080" y="6437376"/>
+            <a:ext cx="5486400" cy="274320"/>
+          </a:xfrm>
+          <a:prstGeom prst="rect">
+            <a:avLst/>
+          </a:prstGeom>
+          <a:noFill/>
+        </p:spPr>
+        <p:txBody>
+          <a:bodyPr wrap="square" lIns="54864" rIns="54864" tIns="27432" bIns="27432" anchor="ctr">
+            <a:noAutofit/>
+          </a:bodyPr>
+          <a:lstStyle/>
+          <a:p>
+            <a:pPr algn="l">
+              <a:lnSpc>
+                <a:spcPct val="115000"/>
+              </a:lnSpc>
+            </a:pPr>
+            <a:r>
+              <a:rPr sz="900" b="1" i="0" spc="250">
+                <a:solidFill>
+                  <a:srgbClr val="26231F"/>
+                </a:solidFill>
+              </a:rPr>
+              <a:t>FAMILY ALBUM</a:t>
+            </a:r>
+          </a:p>
+        </p:txBody>
+      </p:sp>
+      <p:sp>
+        <p:nvSpPr>
+          <p:cNvPr id="6" name="포인트"/>
+          <p:cNvSpPr/>
+          <p:nvPr/>
+        </p:nvSpPr>
+        <p:spPr>
+          <a:xfrm>
+            <a:off x="11213287" y="6473952"/>
+            <a:ext cx="219456" cy="219456"/>
+          </a:xfrm>
+          <a:prstGeom prst="star4">
+            <a:avLst/>
+          </a:prstGeom>
+          <a:solidFill>
+            <a:srgbClr val="E1C698"/>
+          </a:solidFill>
+          <a:ln>
+            <a:noFill/>
+          </a:ln>
+        </p:spPr>
+        <p:txBody>
+          <a:bodyPr rtlCol="0" anchor="ctr"/>
+          <a:lstStyle/>
+          <a:p>
+            <a:pPr algn="ctr"/>
+          </a:p>
+        </p:txBody>
+      </p:sp>
+      <p:sp>
+        <p:nvSpPr>
           <p:cNvPr id="2" name="Title 1"/>
           <p:cNvSpPr>
             <a:spLocks noGrp="1"/>
@@ -4836,8 +5128,8 @@
         </p:nvSpPr>
         <p:spPr>
           <a:xfrm>
-            <a:off x="640080" y="457200"/>
-            <a:ext cx="9722815" cy="868680"/>
+            <a:off x="640080" y="502920"/>
+            <a:ext cx="10911535" cy="914400"/>
           </a:xfrm>
         </p:spPr>
         <p:txBody>
@@ -4854,7 +5146,7 @@
             <a:r>
               <a:rPr sz="3000" b="1" i="0">
                 <a:solidFill>
-                  <a:srgbClr val="7C5D27"/>
+                  <a:srgbClr val="26231F"/>
                 </a:solidFill>
               </a:rPr>
               <a:t>우리 가족의 약속</a:t>
@@ -4864,7 +5156,7 @@
       </p:sp>
       <p:sp>
         <p:nvSpPr>
-          <p:cNvPr id="5" name="줄 1"/>
+          <p:cNvPr id="7" name="줄 1"/>
           <p:cNvSpPr/>
           <p:nvPr/>
         </p:nvSpPr>
@@ -4875,15 +5167,15 @@
           </a:xfrm>
           <a:prstGeom prst="roundRect">
             <a:avLst>
-              <a:gd name="adj" fmla="val 8000"/>
+              <a:gd name="adj" fmla="val 7000"/>
             </a:avLst>
           </a:prstGeom>
           <a:solidFill>
-            <a:srgbClr val="FAF6EF"/>
+            <a:srgbClr val="FFFFFF"/>
           </a:solidFill>
           <a:ln w="12700">
             <a:solidFill>
-              <a:srgbClr val="F2E5CF"/>
+              <a:srgbClr val="EBD4AD"/>
             </a:solidFill>
           </a:ln>
         </p:spPr>
@@ -4897,7 +5189,7 @@
       </p:sp>
       <p:sp>
         <p:nvSpPr>
-          <p:cNvPr id="6" name="번호 1"/>
+          <p:cNvPr id="8" name="번호 1"/>
           <p:cNvSpPr/>
           <p:nvPr/>
         </p:nvSpPr>
@@ -4906,11 +5198,13 @@
             <a:off x="822959" y="1874519"/>
             <a:ext cx="457200" cy="457200"/>
           </a:xfrm>
-          <a:prstGeom prst="ellipse">
-            <a:avLst/>
+          <a:prstGeom prst="roundRect">
+            <a:avLst>
+              <a:gd name="adj" fmla="val 25000"/>
+            </a:avLst>
           </a:prstGeom>
           <a:solidFill>
-            <a:srgbClr val="C49645"/>
+            <a:srgbClr val="E1C698"/>
           </a:solidFill>
           <a:ln>
             <a:noFill/>
@@ -4930,7 +5224,7 @@
             <a:r>
               <a:rPr sz="1600" b="1" i="0">
                 <a:solidFill>
-                  <a:srgbClr val="FFFFFF"/>
+                  <a:srgbClr val="26231F"/>
                 </a:solidFill>
               </a:rPr>
               <a:t>1</a:t>
@@ -4940,7 +5234,7 @@
       </p:sp>
       <p:sp>
         <p:nvSpPr>
-          <p:cNvPr id="7" name="TextBox 6"/>
+          <p:cNvPr id="9" name="TextBox 8"/>
           <p:cNvSpPr txBox="1"/>
           <p:nvPr/>
         </p:nvSpPr>
@@ -4968,7 +5262,7 @@
             <a:r>
               <a:rPr sz="1800" b="1" i="0">
                 <a:solidFill>
-                  <a:srgbClr val="7C5D27"/>
+                  <a:srgbClr val="493D27"/>
                 </a:solidFill>
               </a:rPr>
               <a:t>약속 1</a:t>
@@ -4978,7 +5272,7 @@
       </p:sp>
       <p:sp>
         <p:nvSpPr>
-          <p:cNvPr id="8" name="TextBox 7"/>
+          <p:cNvPr id="10" name="TextBox 9"/>
           <p:cNvSpPr txBox="1"/>
           <p:nvPr/>
         </p:nvSpPr>
@@ -5006,7 +5300,7 @@
             <a:r>
               <a:rPr sz="1700" b="0" i="0">
                 <a:solidFill>
-                  <a:srgbClr val="2B2B2B"/>
+                  <a:srgbClr val="26231F"/>
                 </a:solidFill>
               </a:rPr>
               <a:t>산책은 하루도 거르지 않기</a:t>
@@ -5016,7 +5310,7 @@
       </p:sp>
       <p:sp>
         <p:nvSpPr>
-          <p:cNvPr id="9" name="줄 2"/>
+          <p:cNvPr id="11" name="줄 2"/>
           <p:cNvSpPr/>
           <p:nvPr/>
         </p:nvSpPr>
@@ -5027,15 +5321,15 @@
           </a:xfrm>
           <a:prstGeom prst="roundRect">
             <a:avLst>
-              <a:gd name="adj" fmla="val 8000"/>
+              <a:gd name="adj" fmla="val 7000"/>
             </a:avLst>
           </a:prstGeom>
           <a:solidFill>
-            <a:srgbClr val="FAF6EF"/>
+            <a:srgbClr val="FFFFFF"/>
           </a:solidFill>
           <a:ln w="12700">
             <a:solidFill>
-              <a:srgbClr val="F2E5CF"/>
+              <a:srgbClr val="EBD4AD"/>
             </a:solidFill>
           </a:ln>
         </p:spPr>
@@ -5049,7 +5343,7 @@
       </p:sp>
       <p:sp>
         <p:nvSpPr>
-          <p:cNvPr id="10" name="번호 2"/>
+          <p:cNvPr id="12" name="번호 2"/>
           <p:cNvSpPr/>
           <p:nvPr/>
         </p:nvSpPr>
@@ -5058,11 +5352,13 @@
             <a:off x="822959" y="3017520"/>
             <a:ext cx="457200" cy="457200"/>
           </a:xfrm>
-          <a:prstGeom prst="ellipse">
-            <a:avLst/>
+          <a:prstGeom prst="roundRect">
+            <a:avLst>
+              <a:gd name="adj" fmla="val 25000"/>
+            </a:avLst>
           </a:prstGeom>
           <a:solidFill>
-            <a:srgbClr val="C49645"/>
+            <a:srgbClr val="E1C698"/>
           </a:solidFill>
           <a:ln>
             <a:noFill/>
@@ -5082,7 +5378,7 @@
             <a:r>
               <a:rPr sz="1600" b="1" i="0">
                 <a:solidFill>
-                  <a:srgbClr val="FFFFFF"/>
+                  <a:srgbClr val="26231F"/>
                 </a:solidFill>
               </a:rPr>
               <a:t>2</a:t>
@@ -5092,7 +5388,7 @@
       </p:sp>
       <p:sp>
         <p:nvSpPr>
-          <p:cNvPr id="11" name="TextBox 10"/>
+          <p:cNvPr id="13" name="TextBox 12"/>
           <p:cNvSpPr txBox="1"/>
           <p:nvPr/>
         </p:nvSpPr>
@@ -5120,7 +5416,7 @@
             <a:r>
               <a:rPr sz="1800" b="1" i="0">
                 <a:solidFill>
-                  <a:srgbClr val="7C5D27"/>
+                  <a:srgbClr val="493D27"/>
                 </a:solidFill>
               </a:rPr>
               <a:t>약속 2</a:t>
@@ -5130,7 +5426,7 @@
       </p:sp>
       <p:sp>
         <p:nvSpPr>
-          <p:cNvPr id="12" name="TextBox 11"/>
+          <p:cNvPr id="14" name="TextBox 13"/>
           <p:cNvSpPr txBox="1"/>
           <p:nvPr/>
         </p:nvSpPr>
@@ -5158,7 +5454,7 @@
             <a:r>
               <a:rPr sz="1700" b="0" i="0">
                 <a:solidFill>
-                  <a:srgbClr val="2B2B2B"/>
+                  <a:srgbClr val="26231F"/>
                 </a:solidFill>
               </a:rPr>
               <a:t>건강 검진 날짜 챙기기</a:t>
@@ -5168,7 +5464,7 @@
       </p:sp>
       <p:sp>
         <p:nvSpPr>
-          <p:cNvPr id="13" name="줄 3"/>
+          <p:cNvPr id="15" name="줄 3"/>
           <p:cNvSpPr/>
           <p:nvPr/>
         </p:nvSpPr>
@@ -5179,15 +5475,15 @@
           </a:xfrm>
           <a:prstGeom prst="roundRect">
             <a:avLst>
-              <a:gd name="adj" fmla="val 8000"/>
+              <a:gd name="adj" fmla="val 7000"/>
             </a:avLst>
           </a:prstGeom>
           <a:solidFill>
-            <a:srgbClr val="FAF6EF"/>
+            <a:srgbClr val="FFFFFF"/>
           </a:solidFill>
           <a:ln w="12700">
             <a:solidFill>
-              <a:srgbClr val="F2E5CF"/>
+              <a:srgbClr val="EBD4AD"/>
             </a:solidFill>
           </a:ln>
         </p:spPr>
@@ -5201,7 +5497,7 @@
       </p:sp>
       <p:sp>
         <p:nvSpPr>
-          <p:cNvPr id="14" name="번호 3"/>
+          <p:cNvPr id="16" name="번호 3"/>
           <p:cNvSpPr/>
           <p:nvPr/>
         </p:nvSpPr>
@@ -5210,11 +5506,13 @@
             <a:off x="822959" y="4160520"/>
             <a:ext cx="457200" cy="457200"/>
           </a:xfrm>
-          <a:prstGeom prst="ellipse">
-            <a:avLst/>
+          <a:prstGeom prst="roundRect">
+            <a:avLst>
+              <a:gd name="adj" fmla="val 25000"/>
+            </a:avLst>
           </a:prstGeom>
           <a:solidFill>
-            <a:srgbClr val="C49645"/>
+            <a:srgbClr val="E1C698"/>
           </a:solidFill>
           <a:ln>
             <a:noFill/>
@@ -5234,7 +5532,7 @@
             <a:r>
               <a:rPr sz="1600" b="1" i="0">
                 <a:solidFill>
-                  <a:srgbClr val="FFFFFF"/>
+                  <a:srgbClr val="26231F"/>
                 </a:solidFill>
               </a:rPr>
               <a:t>3</a:t>
@@ -5244,7 +5542,7 @@
       </p:sp>
       <p:sp>
         <p:nvSpPr>
-          <p:cNvPr id="15" name="TextBox 14"/>
+          <p:cNvPr id="17" name="TextBox 16"/>
           <p:cNvSpPr txBox="1"/>
           <p:nvPr/>
         </p:nvSpPr>
@@ -5272,7 +5570,7 @@
             <a:r>
               <a:rPr sz="1800" b="1" i="0">
                 <a:solidFill>
-                  <a:srgbClr val="7C5D27"/>
+                  <a:srgbClr val="493D27"/>
                 </a:solidFill>
               </a:rPr>
               <a:t>약속 3</a:t>
@@ -5282,7 +5580,7 @@
       </p:sp>
       <p:sp>
         <p:nvSpPr>
-          <p:cNvPr id="16" name="TextBox 15"/>
+          <p:cNvPr id="18" name="TextBox 17"/>
           <p:cNvSpPr txBox="1"/>
           <p:nvPr/>
         </p:nvSpPr>
@@ -5310,7 +5608,7 @@
             <a:r>
               <a:rPr sz="1700" b="0" i="0">
                 <a:solidFill>
-                  <a:srgbClr val="2B2B2B"/>
+                  <a:srgbClr val="26231F"/>
                 </a:solidFill>
               </a:rPr>
               <a:t>많이 안아 주고 많이 칭찬하기</a:t>
@@ -5332,7 +5630,7 @@
     <p:bg>
       <p:bgPr>
         <a:solidFill>
-          <a:srgbClr val="FAF6EF"/>
+          <a:srgbClr val="FFFFFF"/>
         </a:solidFill>
         <a:effectLst/>
       </p:bgPr>
@@ -5352,14 +5650,14 @@
         </p:nvSpPr>
         <p:spPr>
           <a:xfrm>
-            <a:off x="0" y="0"/>
-            <a:ext cx="12191695" cy="274320"/>
+            <a:off x="0" y="6565392"/>
+            <a:ext cx="12191695" cy="292608"/>
           </a:xfrm>
           <a:prstGeom prst="rect">
             <a:avLst/>
           </a:prstGeom>
           <a:solidFill>
-            <a:srgbClr val="C49645"/>
+            <a:srgbClr val="EBD4AD"/>
           </a:solidFill>
           <a:ln>
             <a:noFill/>
@@ -5381,14 +5679,14 @@
         </p:nvSpPr>
         <p:spPr>
           <a:xfrm>
-            <a:off x="0" y="274320"/>
-            <a:ext cx="12191695" cy="54864"/>
+            <a:off x="640080" y="6400800"/>
+            <a:ext cx="10911535" cy="10972"/>
           </a:xfrm>
           <a:prstGeom prst="rect">
             <a:avLst/>
           </a:prstGeom>
           <a:solidFill>
-            <a:srgbClr val="3B8591"/>
+            <a:srgbClr val="26231F"/>
           </a:solidFill>
           <a:ln>
             <a:noFill/>
@@ -5404,6 +5702,73 @@
       </p:sp>
       <p:sp>
         <p:nvSpPr>
+          <p:cNvPr id="5" name="하단 라벨"/>
+          <p:cNvSpPr txBox="1"/>
+          <p:nvPr/>
+        </p:nvSpPr>
+        <p:spPr>
+          <a:xfrm>
+            <a:off x="640080" y="6437376"/>
+            <a:ext cx="5486400" cy="274320"/>
+          </a:xfrm>
+          <a:prstGeom prst="rect">
+            <a:avLst/>
+          </a:prstGeom>
+          <a:noFill/>
+        </p:spPr>
+        <p:txBody>
+          <a:bodyPr wrap="square" lIns="54864" rIns="54864" tIns="27432" bIns="27432" anchor="ctr">
+            <a:noAutofit/>
+          </a:bodyPr>
+          <a:lstStyle/>
+          <a:p>
+            <a:pPr algn="l">
+              <a:lnSpc>
+                <a:spcPct val="115000"/>
+              </a:lnSpc>
+            </a:pPr>
+            <a:r>
+              <a:rPr sz="900" b="1" i="0" spc="250">
+                <a:solidFill>
+                  <a:srgbClr val="26231F"/>
+                </a:solidFill>
+              </a:rPr>
+              <a:t>FAMILY ALBUM</a:t>
+            </a:r>
+          </a:p>
+        </p:txBody>
+      </p:sp>
+      <p:sp>
+        <p:nvSpPr>
+          <p:cNvPr id="6" name="포인트"/>
+          <p:cNvSpPr/>
+          <p:nvPr/>
+        </p:nvSpPr>
+        <p:spPr>
+          <a:xfrm>
+            <a:off x="11213287" y="6473952"/>
+            <a:ext cx="219456" cy="219456"/>
+          </a:xfrm>
+          <a:prstGeom prst="star4">
+            <a:avLst/>
+          </a:prstGeom>
+          <a:solidFill>
+            <a:srgbClr val="E1C698"/>
+          </a:solidFill>
+          <a:ln>
+            <a:noFill/>
+          </a:ln>
+        </p:spPr>
+        <p:txBody>
+          <a:bodyPr rtlCol="0" anchor="ctr"/>
+          <a:lstStyle/>
+          <a:p>
+            <a:pPr algn="ctr"/>
+          </a:p>
+        </p:txBody>
+      </p:sp>
+      <p:sp>
+        <p:nvSpPr>
           <p:cNvPr id="2" name="Title 1"/>
           <p:cNvSpPr>
             <a:spLocks noGrp="1"/>
@@ -5414,8 +5779,8 @@
         </p:nvSpPr>
         <p:spPr>
           <a:xfrm>
-            <a:off x="640080" y="457200"/>
-            <a:ext cx="9722815" cy="868680"/>
+            <a:off x="640080" y="502920"/>
+            <a:ext cx="10911535" cy="914400"/>
           </a:xfrm>
         </p:spPr>
         <p:txBody>
@@ -5432,7 +5797,7 @@
             <a:r>
               <a:rPr sz="3000" b="1" i="0">
                 <a:solidFill>
-                  <a:srgbClr val="7C5D27"/>
+                  <a:srgbClr val="26231F"/>
                 </a:solidFill>
               </a:rPr>
               <a:t>가족 사진</a:t>
@@ -5442,14 +5807,14 @@
       </p:sp>
       <p:sp>
         <p:nvSpPr>
-          <p:cNvPr id="5" name="사진 자리"/>
+          <p:cNvPr id="7" name="사진 자리"/>
           <p:cNvSpPr/>
           <p:nvPr/>
         </p:nvSpPr>
         <p:spPr>
           <a:xfrm>
             <a:off x="640080" y="1600200"/>
-            <a:ext cx="3515258" cy="2308860"/>
+            <a:ext cx="3515258" cy="2194560"/>
           </a:xfrm>
           <a:prstGeom prst="roundRect">
             <a:avLst>
@@ -5457,12 +5822,10 @@
             </a:avLst>
           </a:prstGeom>
           <a:solidFill>
-            <a:srgbClr val="F2E5CF"/>
+            <a:srgbClr val="F6EAD5"/>
           </a:solidFill>
           <a:ln w="19050">
-            <a:solidFill>
-              <a:srgbClr val="C49645"/>
-            </a:solidFill>
+            <a:noFill/>
             <a:prstDash val="dash"/>
           </a:ln>
         </p:spPr>
@@ -5480,7 +5843,7 @@
             <a:r>
               <a:rPr sz="1200" b="0" i="0">
                 <a:solidFill>
-                  <a:srgbClr val="7C5D27"/>
+                  <a:srgbClr val="8E8780"/>
                 </a:solidFill>
               </a:rPr>
               <a:t>사진 1</a:t>
@@ -5490,14 +5853,14 @@
       </p:sp>
       <p:sp>
         <p:nvSpPr>
-          <p:cNvPr id="6" name="사진 자리"/>
+          <p:cNvPr id="8" name="사진 자리"/>
           <p:cNvSpPr/>
           <p:nvPr/>
         </p:nvSpPr>
         <p:spPr>
           <a:xfrm>
             <a:off x="4338218" y="1600200"/>
-            <a:ext cx="3515258" cy="2308860"/>
+            <a:ext cx="3515258" cy="2194560"/>
           </a:xfrm>
           <a:prstGeom prst="roundRect">
             <a:avLst>
@@ -5505,12 +5868,10 @@
             </a:avLst>
           </a:prstGeom>
           <a:solidFill>
-            <a:srgbClr val="F2E5CF"/>
+            <a:srgbClr val="F6EAD5"/>
           </a:solidFill>
           <a:ln w="19050">
-            <a:solidFill>
-              <a:srgbClr val="C49645"/>
-            </a:solidFill>
+            <a:noFill/>
             <a:prstDash val="dash"/>
           </a:ln>
         </p:spPr>
@@ -5528,7 +5889,7 @@
             <a:r>
               <a:rPr sz="1200" b="0" i="0">
                 <a:solidFill>
-                  <a:srgbClr val="7C5D27"/>
+                  <a:srgbClr val="8E8780"/>
                 </a:solidFill>
               </a:rPr>
               <a:t>사진 2</a:t>
@@ -5538,14 +5899,14 @@
       </p:sp>
       <p:sp>
         <p:nvSpPr>
-          <p:cNvPr id="7" name="사진 자리"/>
+          <p:cNvPr id="9" name="사진 자리"/>
           <p:cNvSpPr/>
           <p:nvPr/>
         </p:nvSpPr>
         <p:spPr>
           <a:xfrm>
             <a:off x="8036356" y="1600200"/>
-            <a:ext cx="3515258" cy="2308860"/>
+            <a:ext cx="3515258" cy="2194560"/>
           </a:xfrm>
           <a:prstGeom prst="roundRect">
             <a:avLst>
@@ -5553,12 +5914,10 @@
             </a:avLst>
           </a:prstGeom>
           <a:solidFill>
-            <a:srgbClr val="F2E5CF"/>
+            <a:srgbClr val="F6EAD5"/>
           </a:solidFill>
           <a:ln w="19050">
-            <a:solidFill>
-              <a:srgbClr val="C49645"/>
-            </a:solidFill>
+            <a:noFill/>
             <a:prstDash val="dash"/>
           </a:ln>
         </p:spPr>
@@ -5576,7 +5935,7 @@
             <a:r>
               <a:rPr sz="1200" b="0" i="0">
                 <a:solidFill>
-                  <a:srgbClr val="7C5D27"/>
+                  <a:srgbClr val="8E8780"/>
                 </a:solidFill>
               </a:rPr>
               <a:t>사진 3</a:t>
@@ -5586,14 +5945,14 @@
       </p:sp>
       <p:sp>
         <p:nvSpPr>
-          <p:cNvPr id="8" name="사진 자리"/>
+          <p:cNvPr id="10" name="사진 자리"/>
           <p:cNvSpPr/>
           <p:nvPr/>
         </p:nvSpPr>
         <p:spPr>
           <a:xfrm>
-            <a:off x="640080" y="4091939"/>
-            <a:ext cx="3515258" cy="2308860"/>
+            <a:off x="640080" y="3977639"/>
+            <a:ext cx="3515258" cy="2194560"/>
           </a:xfrm>
           <a:prstGeom prst="roundRect">
             <a:avLst>
@@ -5601,12 +5960,10 @@
             </a:avLst>
           </a:prstGeom>
           <a:solidFill>
-            <a:srgbClr val="F2E5CF"/>
+            <a:srgbClr val="F6EAD5"/>
           </a:solidFill>
           <a:ln w="19050">
-            <a:solidFill>
-              <a:srgbClr val="C49645"/>
-            </a:solidFill>
+            <a:noFill/>
             <a:prstDash val="dash"/>
           </a:ln>
         </p:spPr>
@@ -5624,7 +5981,7 @@
             <a:r>
               <a:rPr sz="1200" b="0" i="0">
                 <a:solidFill>
-                  <a:srgbClr val="7C5D27"/>
+                  <a:srgbClr val="8E8780"/>
                 </a:solidFill>
               </a:rPr>
               <a:t>사진 4</a:t>
@@ -5634,14 +5991,14 @@
       </p:sp>
       <p:sp>
         <p:nvSpPr>
-          <p:cNvPr id="9" name="사진 자리"/>
+          <p:cNvPr id="11" name="사진 자리"/>
           <p:cNvSpPr/>
           <p:nvPr/>
         </p:nvSpPr>
         <p:spPr>
           <a:xfrm>
-            <a:off x="4338218" y="4091939"/>
-            <a:ext cx="3515258" cy="2308860"/>
+            <a:off x="4338218" y="3977639"/>
+            <a:ext cx="3515258" cy="2194560"/>
           </a:xfrm>
           <a:prstGeom prst="roundRect">
             <a:avLst>
@@ -5649,12 +6006,10 @@
             </a:avLst>
           </a:prstGeom>
           <a:solidFill>
-            <a:srgbClr val="F2E5CF"/>
+            <a:srgbClr val="F6EAD5"/>
           </a:solidFill>
           <a:ln w="19050">
-            <a:solidFill>
-              <a:srgbClr val="C49645"/>
-            </a:solidFill>
+            <a:noFill/>
             <a:prstDash val="dash"/>
           </a:ln>
         </p:spPr>
@@ -5672,7 +6027,7 @@
             <a:r>
               <a:rPr sz="1200" b="0" i="0">
                 <a:solidFill>
-                  <a:srgbClr val="7C5D27"/>
+                  <a:srgbClr val="8E8780"/>
                 </a:solidFill>
               </a:rPr>
               <a:t>사진 5</a:t>
@@ -5682,14 +6037,14 @@
       </p:sp>
       <p:sp>
         <p:nvSpPr>
-          <p:cNvPr id="10" name="사진 자리"/>
+          <p:cNvPr id="12" name="사진 자리"/>
           <p:cNvSpPr/>
           <p:nvPr/>
         </p:nvSpPr>
         <p:spPr>
           <a:xfrm>
-            <a:off x="8036356" y="4091939"/>
-            <a:ext cx="3515258" cy="2308860"/>
+            <a:off x="8036356" y="3977639"/>
+            <a:ext cx="3515258" cy="2194560"/>
           </a:xfrm>
           <a:prstGeom prst="roundRect">
             <a:avLst>
@@ -5697,12 +6052,10 @@
             </a:avLst>
           </a:prstGeom>
           <a:solidFill>
-            <a:srgbClr val="F2E5CF"/>
+            <a:srgbClr val="F6EAD5"/>
           </a:solidFill>
           <a:ln w="19050">
-            <a:solidFill>
-              <a:srgbClr val="C49645"/>
-            </a:solidFill>
+            <a:noFill/>
             <a:prstDash val="dash"/>
           </a:ln>
         </p:spPr>
@@ -5720,7 +6073,7 @@
             <a:r>
               <a:rPr sz="1200" b="0" i="0">
                 <a:solidFill>
-                  <a:srgbClr val="7C5D27"/>
+                  <a:srgbClr val="8E8780"/>
                 </a:solidFill>
               </a:rPr>
               <a:t>사진 6</a:t>
@@ -5739,6 +6092,14 @@
 <file path=ppt/slides/slide6.xml><?xml version="1.0" encoding="utf-8"?>
 <p:sld xmlns:a="http://schemas.openxmlformats.org/drawingml/2006/main" xmlns:p="http://schemas.openxmlformats.org/presentationml/2006/main" xmlns:r="http://schemas.openxmlformats.org/officeDocument/2006/relationships">
   <p:cSld>
+    <p:bg>
+      <p:bgPr>
+        <a:solidFill>
+          <a:srgbClr val="F6EAD5"/>
+        </a:solidFill>
+        <a:effectLst/>
+      </p:bgPr>
+    </p:bg>
     <p:spTree>
       <p:nvGrpSpPr>
         <p:cNvPr id="1" name=""/>
@@ -5746,30 +6107,119 @@
         <p:nvPr/>
       </p:nvGrpSpPr>
       <p:grpSpPr/>
-      <p:pic>
-        <p:nvPicPr>
-          <p:cNvPr id="3" name="표지 그림" descr="family-45.jpg"/>
-          <p:cNvPicPr>
-            <a:picLocks noChangeAspect="1"/>
-          </p:cNvPicPr>
-          <p:nvPr/>
-        </p:nvPicPr>
-        <p:blipFill>
-          <a:blip r:embed="rId2"/>
-          <a:stretch>
-            <a:fillRect/>
-          </a:stretch>
-        </p:blipFill>
-        <p:spPr>
-          <a:xfrm>
-            <a:off x="0" y="0"/>
-            <a:ext cx="12191695" cy="6858000"/>
+      <p:sp>
+        <p:nvSpPr>
+          <p:cNvPr id="3" name="사진 자리"/>
+          <p:cNvSpPr/>
+          <p:nvPr/>
+        </p:nvSpPr>
+        <p:spPr>
+          <a:xfrm>
+            <a:off x="7558851" y="685800"/>
+            <a:ext cx="3169840" cy="5486400"/>
+          </a:xfrm>
+          <a:prstGeom prst="round2SameRect">
+            <a:avLst>
+              <a:gd name="adj1" fmla="val 50000"/>
+              <a:gd name="adj2" fmla="val 0"/>
+            </a:avLst>
+          </a:prstGeom>
+          <a:solidFill>
+            <a:srgbClr val="EBD4AD"/>
+          </a:solidFill>
+          <a:ln>
+            <a:noFill/>
+          </a:ln>
+        </p:spPr>
+        <p:txBody>
+          <a:bodyPr rtlCol="0" anchor="ctr" wrap="square" lIns="54864" rIns="54864" tIns="27432" bIns="27432">
+            <a:noAutofit/>
+          </a:bodyPr>
+          <a:lstStyle/>
+          <a:p>
+            <a:pPr algn="ctr">
+              <a:lnSpc>
+                <a:spcPct val="100000"/>
+              </a:lnSpc>
+            </a:pPr>
+            <a:r>
+              <a:rPr sz="1400" b="0" i="0">
+                <a:solidFill>
+                  <a:srgbClr val="493D27"/>
+                </a:solidFill>
+              </a:rPr>
+              <a:t>사진을 넣어 주세요</a:t>
+            </a:r>
+          </a:p>
+        </p:txBody>
+      </p:sp>
+      <p:sp>
+        <p:nvSpPr>
+          <p:cNvPr id="4" name="장식"/>
+          <p:cNvSpPr/>
+          <p:nvPr/>
+        </p:nvSpPr>
+        <p:spPr>
+          <a:xfrm>
+            <a:off x="6827349" y="4251960"/>
+            <a:ext cx="1005840" cy="1005840"/>
+          </a:xfrm>
+          <a:prstGeom prst="ellipse">
+            <a:avLst/>
+          </a:prstGeom>
+          <a:solidFill>
+            <a:srgbClr val="EBD4AD"/>
+          </a:solidFill>
+          <a:ln>
+            <a:noFill/>
+          </a:ln>
+        </p:spPr>
+        <p:txBody>
+          <a:bodyPr rtlCol="0" anchor="ctr"/>
+          <a:lstStyle/>
+          <a:p>
+            <a:pPr algn="ctr"/>
+          </a:p>
+        </p:txBody>
+      </p:sp>
+      <p:sp>
+        <p:nvSpPr>
+          <p:cNvPr id="5" name="라벨"/>
+          <p:cNvSpPr txBox="1"/>
+          <p:nvPr/>
+        </p:nvSpPr>
+        <p:spPr>
+          <a:xfrm>
+            <a:off x="822960" y="2148840"/>
+            <a:ext cx="5608179" cy="274320"/>
           </a:xfrm>
           <a:prstGeom prst="rect">
             <a:avLst/>
           </a:prstGeom>
-        </p:spPr>
-      </p:pic>
+          <a:noFill/>
+        </p:spPr>
+        <p:txBody>
+          <a:bodyPr wrap="square" lIns="54864" rIns="54864" tIns="27432" bIns="27432" anchor="t">
+            <a:noAutofit/>
+          </a:bodyPr>
+          <a:lstStyle/>
+          <a:p>
+            <a:pPr algn="l">
+              <a:lnSpc>
+                <a:spcPct val="115000"/>
+              </a:lnSpc>
+            </a:pPr>
+            <a:r>
+              <a:rPr sz="1000" b="1" i="0" spc="250">
+                <a:solidFill>
+                  <a:srgbClr val="26231F"/>
+                </a:solidFill>
+              </a:rPr>
+              <a:t>FAMILY ALBUM</a:t>
+            </a:r>
+          </a:p>
+        </p:txBody>
+      </p:sp>
       <p:sp>
         <p:nvSpPr>
           <p:cNvPr id="2" name="Title 1"/>
@@ -5782,8 +6232,8 @@
         </p:nvSpPr>
         <p:spPr>
           <a:xfrm>
-            <a:off x="853418" y="2057400"/>
-            <a:ext cx="6095847" cy="1554480"/>
+            <a:off x="822960" y="2606040"/>
+            <a:ext cx="5608179" cy="1188720"/>
           </a:xfrm>
         </p:spPr>
         <p:txBody>
@@ -5798,9 +6248,9 @@
               </a:lnSpc>
             </a:pPr>
             <a:r>
-              <a:rPr sz="3600" b="1" i="0">
-                <a:solidFill>
-                  <a:srgbClr val="7C5D27"/>
+              <a:rPr sz="4000" b="1" i="0">
+                <a:solidFill>
+                  <a:srgbClr val="26231F"/>
                 </a:solidFill>
               </a:rPr>
               <a:t>우리 가족 소개를 마칩니다</a:t>
@@ -5810,14 +6260,14 @@
       </p:sp>
       <p:sp>
         <p:nvSpPr>
-          <p:cNvPr id="4" name="한 줄 문구"/>
+          <p:cNvPr id="6" name="한 줄 문구"/>
           <p:cNvSpPr txBox="1"/>
           <p:nvPr/>
         </p:nvSpPr>
         <p:spPr>
           <a:xfrm>
-            <a:off x="853418" y="3749039"/>
-            <a:ext cx="6095847" cy="822960"/>
+            <a:off x="822960" y="3886200"/>
+            <a:ext cx="5608179" cy="822960"/>
           </a:xfrm>
           <a:prstGeom prst="rect">
             <a:avLst/>
@@ -5836,9 +6286,9 @@
               </a:lnSpc>
             </a:pPr>
             <a:r>
-              <a:rPr sz="1700" b="0" i="1">
-                <a:solidFill>
-                  <a:srgbClr val="7C5D27"/>
+              <a:rPr sz="1700" b="0" i="0">
+                <a:solidFill>
+                  <a:srgbClr val="26231F"/>
                 </a:solidFill>
               </a:rPr>
               <a:t>읽어 주셔서 고맙습니다</a:t>
@@ -5848,14 +6298,14 @@
       </p:sp>
       <p:sp>
         <p:nvSpPr>
-          <p:cNvPr id="5" name="안내 문구"/>
+          <p:cNvPr id="7" name="안내 문구"/>
           <p:cNvSpPr txBox="1"/>
           <p:nvPr/>
         </p:nvSpPr>
         <p:spPr>
           <a:xfrm>
-            <a:off x="853418" y="4617720"/>
-            <a:ext cx="6095847" cy="914400"/>
+            <a:off x="822960" y="4754880"/>
+            <a:ext cx="5608179" cy="914400"/>
           </a:xfrm>
           <a:prstGeom prst="rect">
             <a:avLst/>
@@ -5876,7 +6326,7 @@
             <a:r>
               <a:rPr sz="1400" b="0" i="0">
                 <a:solidFill>
-                  <a:srgbClr val="666666"/>
+                  <a:srgbClr val="26231F"/>
                 </a:solidFill>
               </a:rPr>
               <a:t>고맙습니다 · 가족 이름</a:t>
@@ -5903,34 +6353,34 @@
         <a:sysClr val="window" lastClr="FFFFFF"/>
       </a:lt1>
       <a:dk2>
-        <a:srgbClr val="7C5D27"/>
+        <a:srgbClr val="493D27"/>
       </a:dk2>
       <a:lt2>
-        <a:srgbClr val="FAF6EF"/>
+        <a:srgbClr val="FBF6EC"/>
       </a:lt2>
       <a:accent1>
-        <a:srgbClr val="C49645"/>
+        <a:srgbClr val="E1C698"/>
       </a:accent1>
       <a:accent2>
-        <a:srgbClr val="3B8591"/>
+        <a:srgbClr val="E5EAB8"/>
       </a:accent2>
       <a:accent3>
-        <a:srgbClr val="7C5D27"/>
+        <a:srgbClr val="493D27"/>
       </a:accent3>
       <a:accent4>
-        <a:srgbClr val="F2E5CF"/>
+        <a:srgbClr val="F6EAD5"/>
       </a:accent4>
       <a:accent5>
-        <a:srgbClr val="808E6B"/>
+        <a:srgbClr val="E3D8A8"/>
       </a:accent5>
       <a:accent6>
-        <a:srgbClr val="B09E7D"/>
+        <a:srgbClr val="928B7D"/>
       </a:accent6>
       <a:hlink>
-        <a:srgbClr val="C49645"/>
+        <a:srgbClr val="E1C698"/>
       </a:hlink>
       <a:folHlink>
-        <a:srgbClr val="7C5D27"/>
+        <a:srgbClr val="493D27"/>
       </a:folHlink>
     </a:clrScheme>
     <a:fontScheme name="Office">
